--- a/Web Designing Course/L5/Class 5 HTML Forms - Inputs.pptx
+++ b/Web Designing Course/L5/Class 5 HTML Forms - Inputs.pptx
@@ -306,7 +306,7 @@
           <a:p>
             <a:fld id="{4AAD347D-5ACD-4C99-B74B-A9C85AD731AF}" type="datetimeFigureOut">
               <a:rPr lang="en-US" dirty="0"/>
-              <a:t>11/30/2025</a:t>
+              <a:t>1/21/2026</a:t>
             </a:fld>
             <a:endParaRPr lang="en-US" dirty="0"/>
           </a:p>
@@ -576,7 +576,7 @@
           <a:p>
             <a:fld id="{4509A250-FF31-4206-8172-F9D3106AACB1}" type="datetimeFigureOut">
               <a:rPr lang="en-US" dirty="0"/>
-              <a:t>11/30/2025</a:t>
+              <a:t>1/21/2026</a:t>
             </a:fld>
             <a:endParaRPr lang="en-US" dirty="0"/>
           </a:p>
@@ -765,7 +765,7 @@
           <a:p>
             <a:fld id="{4509A250-FF31-4206-8172-F9D3106AACB1}" type="datetimeFigureOut">
               <a:rPr lang="en-US" dirty="0"/>
-              <a:t>11/30/2025</a:t>
+              <a:t>1/21/2026</a:t>
             </a:fld>
             <a:endParaRPr lang="en-US" dirty="0"/>
           </a:p>
@@ -1028,7 +1028,7 @@
           <a:p>
             <a:fld id="{4509A250-FF31-4206-8172-F9D3106AACB1}" type="datetimeFigureOut">
               <a:rPr lang="en-US" dirty="0"/>
-              <a:t>11/30/2025</a:t>
+              <a:t>1/21/2026</a:t>
             </a:fld>
             <a:endParaRPr lang="en-US" dirty="0"/>
           </a:p>
@@ -1355,7 +1355,7 @@
           <a:p>
             <a:fld id="{4509A250-FF31-4206-8172-F9D3106AACB1}" type="datetimeFigureOut">
               <a:rPr lang="en-US" dirty="0"/>
-              <a:t>11/30/2025</a:t>
+              <a:t>1/21/2026</a:t>
             </a:fld>
             <a:endParaRPr lang="en-US" dirty="0"/>
           </a:p>
@@ -1960,7 +1960,7 @@
           <a:p>
             <a:fld id="{4509A250-FF31-4206-8172-F9D3106AACB1}" type="datetimeFigureOut">
               <a:rPr lang="en-US" dirty="0"/>
-              <a:t>11/30/2025</a:t>
+              <a:t>1/21/2026</a:t>
             </a:fld>
             <a:endParaRPr lang="en-US" dirty="0"/>
           </a:p>
@@ -2802,7 +2802,7 @@
           <a:p>
             <a:fld id="{4509A250-FF31-4206-8172-F9D3106AACB1}" type="datetimeFigureOut">
               <a:rPr lang="en-US" dirty="0"/>
-              <a:t>11/30/2025</a:t>
+              <a:t>1/21/2026</a:t>
             </a:fld>
             <a:endParaRPr lang="en-US" dirty="0"/>
           </a:p>
@@ -2967,7 +2967,7 @@
           <a:p>
             <a:fld id="{4509A250-FF31-4206-8172-F9D3106AACB1}" type="datetimeFigureOut">
               <a:rPr lang="en-US" dirty="0"/>
-              <a:t>11/30/2025</a:t>
+              <a:t>1/21/2026</a:t>
             </a:fld>
             <a:endParaRPr lang="en-US" dirty="0"/>
           </a:p>
@@ -3142,7 +3142,7 @@
           <a:p>
             <a:fld id="{4509A250-FF31-4206-8172-F9D3106AACB1}" type="datetimeFigureOut">
               <a:rPr lang="en-US" dirty="0"/>
-              <a:t>11/30/2025</a:t>
+              <a:t>1/21/2026</a:t>
             </a:fld>
             <a:endParaRPr lang="en-US" dirty="0"/>
           </a:p>
@@ -3307,7 +3307,7 @@
           <a:p>
             <a:fld id="{4509A250-FF31-4206-8172-F9D3106AACB1}" type="datetimeFigureOut">
               <a:rPr lang="en-US" dirty="0"/>
-              <a:t>11/30/2025</a:t>
+              <a:t>1/21/2026</a:t>
             </a:fld>
             <a:endParaRPr lang="en-US" dirty="0"/>
           </a:p>
@@ -3546,7 +3546,7 @@
           <a:p>
             <a:fld id="{4509A250-FF31-4206-8172-F9D3106AACB1}" type="datetimeFigureOut">
               <a:rPr lang="en-US" dirty="0"/>
-              <a:t>11/30/2025</a:t>
+              <a:t>1/21/2026</a:t>
             </a:fld>
             <a:endParaRPr lang="en-US" dirty="0"/>
           </a:p>
@@ -3833,7 +3833,7 @@
           <a:p>
             <a:fld id="{4509A250-FF31-4206-8172-F9D3106AACB1}" type="datetimeFigureOut">
               <a:rPr lang="en-US" dirty="0"/>
-              <a:t>11/30/2025</a:t>
+              <a:t>1/21/2026</a:t>
             </a:fld>
             <a:endParaRPr lang="en-US" dirty="0"/>
           </a:p>
@@ -4266,7 +4266,7 @@
           <a:p>
             <a:fld id="{4509A250-FF31-4206-8172-F9D3106AACB1}" type="datetimeFigureOut">
               <a:rPr lang="en-US" dirty="0"/>
-              <a:t>11/30/2025</a:t>
+              <a:t>1/21/2026</a:t>
             </a:fld>
             <a:endParaRPr lang="en-US" dirty="0"/>
           </a:p>
@@ -4379,7 +4379,7 @@
           <a:p>
             <a:fld id="{4509A250-FF31-4206-8172-F9D3106AACB1}" type="datetimeFigureOut">
               <a:rPr lang="en-US" dirty="0"/>
-              <a:t>11/30/2025</a:t>
+              <a:t>1/21/2026</a:t>
             </a:fld>
             <a:endParaRPr lang="en-US" dirty="0"/>
           </a:p>
@@ -4469,7 +4469,7 @@
           <a:p>
             <a:fld id="{4509A250-FF31-4206-8172-F9D3106AACB1}" type="datetimeFigureOut">
               <a:rPr lang="en-US" dirty="0"/>
-              <a:t>11/30/2025</a:t>
+              <a:t>1/21/2026</a:t>
             </a:fld>
             <a:endParaRPr lang="en-US" dirty="0"/>
           </a:p>
@@ -4743,7 +4743,7 @@
           <a:p>
             <a:fld id="{4509A250-FF31-4206-8172-F9D3106AACB1}" type="datetimeFigureOut">
               <a:rPr lang="en-US" dirty="0"/>
-              <a:t>11/30/2025</a:t>
+              <a:t>1/21/2026</a:t>
             </a:fld>
             <a:endParaRPr lang="en-US" dirty="0"/>
           </a:p>
@@ -5013,7 +5013,7 @@
           <a:p>
             <a:fld id="{4509A250-FF31-4206-8172-F9D3106AACB1}" type="datetimeFigureOut">
               <a:rPr lang="en-US" dirty="0"/>
-              <a:t>11/30/2025</a:t>
+              <a:t>1/21/2026</a:t>
             </a:fld>
             <a:endParaRPr lang="en-US" dirty="0"/>
           </a:p>
@@ -5437,7 +5437,7 @@
           <a:p>
             <a:fld id="{4509A250-FF31-4206-8172-F9D3106AACB1}" type="datetimeFigureOut">
               <a:rPr lang="en-US" dirty="0"/>
-              <a:t>11/30/2025</a:t>
+              <a:t>1/21/2026</a:t>
             </a:fld>
             <a:endParaRPr lang="en-US" dirty="0"/>
           </a:p>
@@ -6147,11 +6147,7 @@
             </a:pPr>
             <a:r>
               <a:rPr lang="en-US" altLang="en-US" b="1" u="sng" dirty="0"/>
-              <a:t>Basic </a:t>
-            </a:r>
-            <a:r>
-              <a:rPr lang="en-US" altLang="en-US" b="1" u="sng" dirty="0"/>
-              <a:t>Validation Attributes</a:t>
+              <a:t>Basic Validation Attributes</a:t>
             </a:r>
           </a:p>
         </p:txBody>
@@ -6262,13 +6258,6 @@
               </a:rPr>
               <a:t>&lt;input type="text" required&gt; </a:t>
             </a:r>
-            <a:endParaRPr lang="en-US" altLang="en-US" sz="2000" i="1" dirty="0">
-              <a:solidFill>
-                <a:srgbClr val="FFFF00"/>
-              </a:solidFill>
-              <a:latin typeface="Calibri" panose="020F0502020204030204" pitchFamily="34" charset="0"/>
-              <a:cs typeface="Calibri" panose="020F0502020204030204" pitchFamily="34" charset="0"/>
-            </a:endParaRPr>
           </a:p>
           <a:p>
             <a:pPr marL="342900" lvl="0" indent="-342900" defTabSz="914400" eaLnBrk="0" fontAlgn="base" hangingPunct="0">
@@ -8869,11 +8858,7 @@
             </a:r>
             <a:r>
               <a:rPr lang="en-US" b="1" dirty="0" smtClean="0"/>
-              <a:t> </a:t>
-            </a:r>
-            <a:r>
-              <a:rPr lang="en-US" b="1" dirty="0" smtClean="0"/>
-              <a:t>class of web designing</a:t>
+              <a:t> class of web designing</a:t>
             </a:r>
             <a:endParaRPr lang="en-US" b="1" dirty="0"/>
           </a:p>
@@ -10369,7 +10354,7 @@
         <p:spPr bwMode="auto">
           <a:xfrm>
             <a:off x="1155700" y="1942376"/>
-            <a:ext cx="9793835" cy="3170099"/>
+            <a:ext cx="9559797" cy="3170099"/>
           </a:xfrm>
           <a:prstGeom prst="rect">
             <a:avLst/>
@@ -10479,14 +10464,14 @@
               <a:t>&lt;form action="</a:t>
             </a:r>
             <a:r>
-              <a:rPr lang="en-US" altLang="en-US" sz="2000" i="1" dirty="0" err="1">
+              <a:rPr lang="en-US" altLang="en-US" sz="2000" i="1" dirty="0" smtClean="0">
                 <a:solidFill>
                   <a:srgbClr val="FFFF00"/>
                 </a:solidFill>
                 <a:latin typeface="Calibri" panose="020F0502020204030204" pitchFamily="34" charset="0"/>
                 <a:cs typeface="Calibri" panose="020F0502020204030204" pitchFamily="34" charset="0"/>
               </a:rPr>
-              <a:t>submit.php</a:t>
+              <a:t>submit.js" </a:t>
             </a:r>
             <a:r>
               <a:rPr lang="en-US" altLang="en-US" sz="2000" i="1" dirty="0">
@@ -10496,7 +10481,7 @@
                 <a:latin typeface="Calibri" panose="020F0502020204030204" pitchFamily="34" charset="0"/>
                 <a:cs typeface="Calibri" panose="020F0502020204030204" pitchFamily="34" charset="0"/>
               </a:rPr>
-              <a:t>" method="post"&gt; </a:t>
+              <a:t>method="post"&gt; </a:t>
             </a:r>
             <a:r>
               <a:rPr lang="en-US" altLang="en-US" sz="2000" i="1" dirty="0">
@@ -12859,13 +12844,6 @@
               </a:rPr>
               <a:t>&lt;label for="username"&gt;Name:&lt;/label&gt; </a:t>
             </a:r>
-            <a:endParaRPr lang="en-US" altLang="en-US" sz="2000" i="1" dirty="0">
-              <a:solidFill>
-                <a:srgbClr val="FFFF00"/>
-              </a:solidFill>
-              <a:latin typeface="Calibri" panose="020F0502020204030204" pitchFamily="34" charset="0"/>
-              <a:cs typeface="Calibri" panose="020F0502020204030204" pitchFamily="34" charset="0"/>
-            </a:endParaRPr>
           </a:p>
           <a:p>
             <a:pPr marL="800100" lvl="1" indent="-342900" defTabSz="914400" eaLnBrk="0" fontAlgn="base" hangingPunct="0">
@@ -12888,17 +12866,7 @@
                 <a:latin typeface="Calibri" panose="020F0502020204030204" pitchFamily="34" charset="0"/>
                 <a:cs typeface="Calibri" panose="020F0502020204030204" pitchFamily="34" charset="0"/>
               </a:rPr>
-              <a:t>&lt;</a:t>
-            </a:r>
-            <a:r>
-              <a:rPr lang="en-US" altLang="en-US" sz="2000" i="1" dirty="0">
-                <a:solidFill>
-                  <a:srgbClr val="FFFF00"/>
-                </a:solidFill>
-                <a:latin typeface="Calibri" panose="020F0502020204030204" pitchFamily="34" charset="0"/>
-                <a:cs typeface="Calibri" panose="020F0502020204030204" pitchFamily="34" charset="0"/>
-              </a:rPr>
-              <a:t>input type="text" id="username"&gt;</a:t>
+              <a:t>&lt;input type="text" id="username"&gt;</a:t>
             </a:r>
           </a:p>
         </p:txBody>
@@ -13466,7 +13434,6 @@
               <a:rPr lang="en-US" altLang="en-US" b="1" dirty="0"/>
               <a:t> </a:t>
             </a:r>
-            <a:endParaRPr lang="en-US" altLang="en-US" b="1" dirty="0"/>
           </a:p>
         </p:txBody>
       </p:sp>
